--- a/decks/maths-speed/maths-speed_ch6_graphs-speed.pptx
+++ b/decks/maths-speed/maths-speed_ch6_graphs-speed.pptx
@@ -122,28 +122,28 @@
   <p:extLst>
     <p:ext uri="{521415D9-36F7-43E2-AB2F-B90AF26B5E84}">
       <p14:sectionLst xmlns:p14="http://schemas.microsoft.com/office/powerpoint/2010/main">
-        <p14:section name="Opening" id="{b8fd0d28-30f4-b3e8-3b86-855c20f4c76c}">
+        <p14:section name="Opening" id="{f664f013-963b-9a5a-d78d-c35feb4401c2}">
           <p14:sldIdLst>
             <p14:sldId id="256"/>
           </p14:sldIdLst>
         </p14:section>
-        <p14:section name="Gate" id="{cdfcfaf7-b2a1-aea3-c977-d223e52b3fa0}">
+        <p14:section name="Gate" id="{5de171b1-8f36-47da-55b3-c5bf7aa93b50}">
           <p14:sldIdLst>
             <p14:sldId id="257"/>
             <p14:sldId id="258"/>
           </p14:sldIdLst>
         </p14:section>
-        <p14:section name="Pre-teach" id="{11bbd3b4-9ccc-16ac-4189-d55f3c9d6268}">
+        <p14:section name="Pre-teach" id="{198af3bb-0bf5-e2ea-694a-12e5a6afa4b5}">
           <p14:sldIdLst>
             <p14:sldId id="259"/>
           </p14:sldIdLst>
         </p14:section>
-        <p14:section name="Read-along" id="{2d0b3a76-d11e-235e-091c-edf67029526a}">
+        <p14:section name="Read-along" id="{2cd8d142-9416-8898-b1a6-f021e9249120}">
           <p14:sldIdLst>
             <p14:sldId id="260"/>
           </p14:sldIdLst>
         </p14:section>
-        <p14:section name="Teach" id="{c2b9e1b5-662b-1b5d-9d60-542a0a383c96}">
+        <p14:section name="Teach" id="{6d83f82c-9ae8-cbe9-c010-be6167b1f5e0}">
           <p14:sldIdLst>
             <p14:sldId id="261"/>
             <p14:sldId id="262"/>
@@ -151,19 +151,19 @@
             <p14:sldId id="264"/>
           </p14:sldIdLst>
         </p14:section>
-        <p14:section name="Routes" id="{98f9d6be-afd8-a0d0-0d59-48601889b6bc}">
+        <p14:section name="Routes" id="{e1716b7a-372f-a3d4-b49b-968ffdb21278}">
           <p14:sldIdLst>
             <p14:sldId id="265"/>
             <p14:sldId id="266"/>
             <p14:sldId id="267"/>
           </p14:sldIdLst>
         </p14:section>
-        <p14:section name="Close" id="{8e2f6da3-00a6-e8bf-a1bc-f59a26872481}">
+        <p14:section name="Close" id="{84b72b65-50b3-1e93-52b3-b89224da3710}">
           <p14:sldIdLst>
             <p14:sldId id="268"/>
           </p14:sldIdLst>
         </p14:section>
-        <p14:section name="Answers" id="{75440487-1c64-5d5b-d9d9-d3cdd33ca632}">
+        <p14:section name="Answers" id="{a26430cc-561d-a4a7-e8d5-7bb707067a24}">
           <p14:sldIdLst>
             <p14:sldId id="269"/>
             <p14:sldId id="270"/>
@@ -8358,7 +8358,7 @@
                 <a:ea typeface="Calibri" pitchFamily="34" charset="-122"/>
                 <a:cs typeface="Calibri" pitchFamily="34" charset="-120"/>
               </a:rPr>
-              <a:t>Car Q is faster</a:t>
+              <a:t>Car P travels further in total</a:t>
             </a:r>
             <a:endParaRPr lang="en-US" sz="1800" dirty="0"/>
           </a:p>
@@ -8395,7 +8395,7 @@
                 <a:ea typeface="Calibri" pitchFamily="34" charset="-122"/>
                 <a:cs typeface="Calibri" pitchFamily="34" charset="-120"/>
               </a:rPr>
-              <a:t>Car P travels further in total</a:t>
+              <a:t>Car Q is faster</a:t>
             </a:r>
             <a:endParaRPr lang="en-US" sz="1800" dirty="0"/>
           </a:p>

--- a/decks/maths-speed/maths-speed_ch6_graphs-speed.pptx
+++ b/decks/maths-speed/maths-speed_ch6_graphs-speed.pptx
@@ -122,28 +122,28 @@
   <p:extLst>
     <p:ext uri="{521415D9-36F7-43E2-AB2F-B90AF26B5E84}">
       <p14:sectionLst xmlns:p14="http://schemas.microsoft.com/office/powerpoint/2010/main">
-        <p14:section name="Opening" id="{f664f013-963b-9a5a-d78d-c35feb4401c2}">
+        <p14:section name="Opening" id="{3daf3f28-a81b-2794-451c-131412b0f7fd}">
           <p14:sldIdLst>
             <p14:sldId id="256"/>
           </p14:sldIdLst>
         </p14:section>
-        <p14:section name="Gate" id="{5de171b1-8f36-47da-55b3-c5bf7aa93b50}">
+        <p14:section name="Gate" id="{c7349dad-72c3-fe68-75a2-ce4fba8c7710}">
           <p14:sldIdLst>
             <p14:sldId id="257"/>
             <p14:sldId id="258"/>
           </p14:sldIdLst>
         </p14:section>
-        <p14:section name="Pre-teach" id="{198af3bb-0bf5-e2ea-694a-12e5a6afa4b5}">
+        <p14:section name="Pre-teach" id="{a2e1e794-dfa0-db10-a2ee-5e8a99207ef1}">
           <p14:sldIdLst>
             <p14:sldId id="259"/>
           </p14:sldIdLst>
         </p14:section>
-        <p14:section name="Read-along" id="{2cd8d142-9416-8898-b1a6-f021e9249120}">
+        <p14:section name="Read-along" id="{ca484d39-8b7b-6e27-9803-139ce27c5ad1}">
           <p14:sldIdLst>
             <p14:sldId id="260"/>
           </p14:sldIdLst>
         </p14:section>
-        <p14:section name="Teach" id="{6d83f82c-9ae8-cbe9-c010-be6167b1f5e0}">
+        <p14:section name="Teach" id="{ce7e1fdd-3913-0385-c38e-bd5f21d562b8}">
           <p14:sldIdLst>
             <p14:sldId id="261"/>
             <p14:sldId id="262"/>
@@ -151,19 +151,19 @@
             <p14:sldId id="264"/>
           </p14:sldIdLst>
         </p14:section>
-        <p14:section name="Routes" id="{e1716b7a-372f-a3d4-b49b-968ffdb21278}">
+        <p14:section name="Routes" id="{07b43bfc-473d-0127-f260-c100c85f85b6}">
           <p14:sldIdLst>
             <p14:sldId id="265"/>
             <p14:sldId id="266"/>
             <p14:sldId id="267"/>
           </p14:sldIdLst>
         </p14:section>
-        <p14:section name="Close" id="{84b72b65-50b3-1e93-52b3-b89224da3710}">
+        <p14:section name="Close" id="{4967ff4c-729d-2fe5-d1f6-5bbbad48c179}">
           <p14:sldIdLst>
             <p14:sldId id="268"/>
           </p14:sldIdLst>
         </p14:section>
-        <p14:section name="Answers" id="{a26430cc-561d-a4a7-e8d5-7bb707067a24}">
+        <p14:section name="Answers" id="{70f7387a-ff0c-20da-da1a-6e918096e390}">
           <p14:sldIdLst>
             <p14:sldId id="269"/>
             <p14:sldId id="270"/>
